--- a/templates/000_pm_suite/01_프로젝트 관리/07_의사소통관리/04_완료보고/프로젝트명_완료보고_V1.0_20220530.pptx
+++ b/templates/000_pm_suite/01_프로젝트 관리/07_의사소통관리/04_완료보고/프로젝트명_완료보고_V1.0_20220530.pptx
@@ -3168,7 +3168,7 @@
               </a:defRPr>
             </a:pPr>
             <a:r>
-              <a:t>HANBIT GLOBAL SyncGuard AI</a:t>
+              <a:t>HANBIT GLOBAL SyncFlow AI</a:t>
             </a:r>
           </a:p>
           <a:p>
@@ -3198,7 +3198,7 @@
               </a:defRPr>
             </a:pPr>
             <a:r>
-              <a:t>한빛글로벌 엔터프라이즈 AI 콘텐츠·규제 심의 자동화 시스템(SyncGuard AI) 구축 완수 보고</a:t>
+              <a:t>한빛글로벌 지능형 공급망 구매·조달 계약 및 부품 품질규격 AI 검증 플랫폼(SyncFlow AI) 구축 완수 보고</a:t>
             </a:r>
           </a:p>
         </p:txBody>
@@ -3218,11 +3218,11 @@
             <a:avLst/>
           </a:prstGeom>
           <a:solidFill>
-            <a:srgbClr val="1E293B"/>
+            <a:srgbClr val="0F2942"/>
           </a:solidFill>
           <a:ln>
             <a:solidFill>
-              <a:srgbClr val="334155"/>
+              <a:srgbClr val="1E3A5F"/>
             </a:solidFill>
           </a:ln>
         </p:spPr>
@@ -3400,7 +3400,7 @@
               </a:defRPr>
             </a:pPr>
             <a:r>
-              <a:t>SyncGuard AI 사업 완료보고서  &gt;  1. 사업 완수 개요</a:t>
+              <a:t>SyncFlow AI 사업 완료보고서  &gt;  1. 사업 완수 개요</a:t>
             </a:r>
           </a:p>
         </p:txBody>
@@ -3465,7 +3465,7 @@
             <a:pPr algn="r">
               <a:defRPr sz="1000" b="1">
                 <a:solidFill>
-                  <a:srgbClr val="1E293B"/>
+                  <a:srgbClr val="0F2942"/>
                 </a:solidFill>
               </a:defRPr>
             </a:pPr>
@@ -3550,7 +3550,7 @@
               </a:defRPr>
             </a:pPr>
             <a:r>
-              <a:t>SyncGuard AI | 프로젝트 최종 완수 및 검수 요청 종료보고서</a:t>
+              <a:t>SyncFlow AI | 프로젝트 최종 완수 및 검수 요청 종료보고서</a:t>
             </a:r>
           </a:p>
         </p:txBody>
@@ -3721,7 +3721,7 @@
               </a:spcBef>
               <a:defRPr sz="950">
                 <a:solidFill>
-                  <a:srgbClr val="334155"/>
+                  <a:srgbClr val="1E3A5F"/>
                 </a:solidFill>
               </a:defRPr>
             </a:pPr>
@@ -3814,7 +3814,7 @@
               </a:defRPr>
             </a:pPr>
             <a:r>
-              <a:t>AI 심의 정확도</a:t>
+              <a:t>AI 검증 정확도</a:t>
             </a:r>
           </a:p>
           <a:p>
@@ -3839,7 +3839,7 @@
               </a:spcBef>
               <a:defRPr sz="950">
                 <a:solidFill>
-                  <a:srgbClr val="334155"/>
+                  <a:srgbClr val="1E3A5F"/>
                 </a:solidFill>
               </a:defRPr>
             </a:pPr>
@@ -3932,7 +3932,7 @@
               </a:defRPr>
             </a:pPr>
             <a:r>
-              <a:t>심의 리드타임 감축</a:t>
+              <a:t>검증 리드타임 감축</a:t>
             </a:r>
           </a:p>
           <a:p>
@@ -3957,16 +3957,16 @@
               </a:spcBef>
               <a:defRPr sz="950">
                 <a:solidFill>
-                  <a:srgbClr val="334155"/>
-                </a:solidFill>
-              </a:defRPr>
-            </a:pPr>
-            <a:r>
-              <a:t>평균 심의 소요시간 85% 대폭 감축</a:t>
+                  <a:srgbClr val="1E3A5F"/>
+                </a:solidFill>
+              </a:defRPr>
+            </a:pPr>
+            <a:r>
+              <a:t>평균 검증 소요시간 85% 대폭 감축</a:t>
             </a:r>
             <a:br/>
             <a:r>
-              <a:t>긴급 마케팅 심의 15분 내 처리</a:t>
+              <a:t>긴급 구매조달 검증 15분 내 처리</a:t>
             </a:r>
             <a:br/>
             <a:r>
@@ -4075,7 +4075,7 @@
               </a:spcBef>
               <a:defRPr sz="950">
                 <a:solidFill>
-                  <a:srgbClr val="334155"/>
+                  <a:srgbClr val="1E3A5F"/>
                 </a:solidFill>
               </a:defRPr>
             </a:pPr>
@@ -4178,7 +4178,7 @@
               </a:spcBef>
               <a:defRPr sz="1000">
                 <a:solidFill>
-                  <a:srgbClr val="334155"/>
+                  <a:srgbClr val="1E3A5F"/>
                 </a:solidFill>
               </a:defRPr>
             </a:pPr>
@@ -4193,12 +4193,12 @@
               </a:spcBef>
               <a:defRPr sz="1000">
                 <a:solidFill>
-                  <a:srgbClr val="334155"/>
-                </a:solidFill>
-              </a:defRPr>
-            </a:pPr>
-            <a:r>
-              <a:t>• 실무 적용성 검증: 한빛글로벌 루미에르, 아쿠아퓨어, 그린네이처, 더마쉴드 등 주요 11개 브랜드 142건 실데이터 시범운영을 통해 업무 안정성 입증.</a:t>
+                  <a:srgbClr val="1E3A5F"/>
+                </a:solidFill>
+              </a:defRPr>
+            </a:pPr>
+            <a:r>
+              <a:t>• 실무 적용성 검증: 한빛글로벌 전장시스템본부, 배터리모듈본부, 글로벌조달본부, 스마트팩토리본부 등 주요 11개 사업본부 142건 실데이터 시범운영을 통해 업무 안정성 입증.</a:t>
             </a:r>
           </a:p>
           <a:p>
@@ -4208,12 +4208,12 @@
               </a:spcBef>
               <a:defRPr sz="1000">
                 <a:solidFill>
-                  <a:srgbClr val="334155"/>
-                </a:solidFill>
-              </a:defRPr>
-            </a:pPr>
-            <a:r>
-              <a:t>• 외부 시스템 연계 무결성: 사내 ProductLab(배합·원료 규격), MarketingHub(결재 포털), 전사 통합 SSO 로그인 및 KT 문자 알림망 연계 100% 정상 가동.</a:t>
+                  <a:srgbClr val="1E3A5F"/>
+                </a:solidFill>
+              </a:defRPr>
+            </a:pPr>
+            <a:r>
+              <a:t>• 외부 시스템 연계 무결성: 사내 PLM-Nexus(조성·원소재 규격), SRM-Portal(결재 포털), 전사 통합 SSO 로그인 및 KT 문자 알림망 연계 100% 정상 가동.</a:t>
             </a:r>
           </a:p>
           <a:p>
@@ -4223,7 +4223,7 @@
               </a:spcBef>
               <a:defRPr sz="1000">
                 <a:solidFill>
-                  <a:srgbClr val="334155"/>
+                  <a:srgbClr val="1E3A5F"/>
                 </a:solidFill>
               </a:defRPr>
             </a:pPr>
@@ -4326,7 +4326,7 @@
               </a:defRPr>
             </a:pPr>
             <a:r>
-              <a:t>SyncGuard AI 사업 완료보고서  &gt;  2. 시스템 구축 범위</a:t>
+              <a:t>SyncFlow AI 사업 완료보고서  &gt;  2. 시스템 구축 범위</a:t>
             </a:r>
           </a:p>
         </p:txBody>
@@ -4391,7 +4391,7 @@
             <a:pPr algn="r">
               <a:defRPr sz="1000" b="1">
                 <a:solidFill>
-                  <a:srgbClr val="1E293B"/>
+                  <a:srgbClr val="0F2942"/>
                 </a:solidFill>
               </a:defRPr>
             </a:pPr>
@@ -4476,7 +4476,7 @@
               </a:defRPr>
             </a:pPr>
             <a:r>
-              <a:t>SyncGuard AI | 프로젝트 최종 완수 및 검수 요청 종료보고서</a:t>
+              <a:t>SyncFlow AI | 프로젝트 최종 완수 및 검수 요청 종료보고서</a:t>
             </a:r>
           </a:p>
         </p:txBody>
@@ -4622,7 +4622,7 @@
               </a:defRPr>
             </a:pPr>
             <a:r>
-              <a:t>1. 통합 심의 포털 (Front-End)</a:t>
+              <a:t>1. 통합 검증 포털 (Front-End)</a:t>
             </a:r>
           </a:p>
           <a:p>
@@ -4632,7 +4632,7 @@
               </a:spcBef>
               <a:defRPr sz="950">
                 <a:solidFill>
-                  <a:srgbClr val="334155"/>
+                  <a:srgbClr val="1E3A5F"/>
                 </a:solidFill>
               </a:defRPr>
             </a:pPr>
@@ -4647,12 +4647,12 @@
               </a:spcBef>
               <a:defRPr sz="950">
                 <a:solidFill>
-                  <a:srgbClr val="334155"/>
-                </a:solidFill>
-              </a:defRPr>
-            </a:pPr>
-            <a:r>
-              <a:t>• 클레임 심의 접수 / 실시간 모니터링 / 이력 조회</a:t>
+                  <a:srgbClr val="1E3A5F"/>
+                </a:solidFill>
+              </a:defRPr>
+            </a:pPr>
+            <a:r>
+              <a:t>• 규격·계약 검증 접수 / 실시간 모니터링 / 이력 조회</a:t>
             </a:r>
           </a:p>
           <a:p>
@@ -4662,12 +4662,12 @@
               </a:spcBef>
               <a:defRPr sz="950">
                 <a:solidFill>
-                  <a:srgbClr val="334155"/>
-                </a:solidFill>
-              </a:defRPr>
-            </a:pPr>
-            <a:r>
-              <a:t>• 다양한 형식(텍스트, 이미지 PDP, Word, PDF) 심의 지원</a:t>
+                  <a:srgbClr val="1E3A5F"/>
+                </a:solidFill>
+              </a:defRPr>
+            </a:pPr>
+            <a:r>
+              <a:t>• 다양한 형식(텍스트, 이미지 PDP, Word, PDF) 검증 지원</a:t>
             </a:r>
           </a:p>
           <a:p>
@@ -4677,12 +4677,12 @@
               </a:spcBef>
               <a:defRPr sz="950">
                 <a:solidFill>
-                  <a:srgbClr val="334155"/>
-                </a:solidFill>
-              </a:defRPr>
-            </a:pPr>
-            <a:r>
-              <a:t>• 마케팅-RA 담당자 간 양방향 피드백 및 결재 연동</a:t>
+                  <a:srgbClr val="1E3A5F"/>
+                </a:solidFill>
+              </a:defRPr>
+            </a:pPr>
+            <a:r>
+              <a:t>• 구매조달-법무·QA 담당자 간 양방향 피드백 및 결재 연동</a:t>
             </a:r>
           </a:p>
         </p:txBody>
@@ -4772,7 +4772,7 @@
               </a:spcBef>
               <a:defRPr sz="950">
                 <a:solidFill>
-                  <a:srgbClr val="334155"/>
+                  <a:srgbClr val="1E3A5F"/>
                 </a:solidFill>
               </a:defRPr>
             </a:pPr>
@@ -4787,7 +4787,7 @@
               </a:spcBef>
               <a:defRPr sz="950">
                 <a:solidFill>
-                  <a:srgbClr val="334155"/>
+                  <a:srgbClr val="1E3A5F"/>
                 </a:solidFill>
               </a:defRPr>
             </a:pPr>
@@ -4802,7 +4802,7 @@
               </a:spcBef>
               <a:defRPr sz="950">
                 <a:solidFill>
-                  <a:srgbClr val="334155"/>
+                  <a:srgbClr val="1E3A5F"/>
                 </a:solidFill>
               </a:defRPr>
             </a:pPr>
@@ -4817,12 +4817,12 @@
               </a:spcBef>
               <a:defRPr sz="950">
                 <a:solidFill>
-                  <a:srgbClr val="334155"/>
-                </a:solidFill>
-              </a:defRPr>
-            </a:pPr>
-            <a:r>
-              <a:t>• Vision OCR 기반 이미지 상세페이지 텍스트 자동 추출</a:t>
+                  <a:srgbClr val="1E3A5F"/>
+                </a:solidFill>
+              </a:defRPr>
+            </a:pPr>
+            <a:r>
+              <a:t>• Vision OCR 기반 이미지 기술시방서 텍스트 자동 추출</a:t>
             </a:r>
           </a:p>
         </p:txBody>
@@ -4912,12 +4912,12 @@
               </a:spcBef>
               <a:defRPr sz="950">
                 <a:solidFill>
-                  <a:srgbClr val="334155"/>
-                </a:solidFill>
-              </a:defRPr>
-            </a:pPr>
-            <a:r>
-              <a:t>• ProductLab 원료/배합 규격 REST API 실시간 연동</a:t>
+                  <a:srgbClr val="1E3A5F"/>
+                </a:solidFill>
+              </a:defRPr>
+            </a:pPr>
+            <a:r>
+              <a:t>• PLM-Nexus 원소재/조성 규격 REST API 실시간 연동</a:t>
             </a:r>
           </a:p>
           <a:p>
@@ -4927,12 +4927,12 @@
               </a:spcBef>
               <a:defRPr sz="950">
                 <a:solidFill>
-                  <a:srgbClr val="334155"/>
-                </a:solidFill>
-              </a:defRPr>
-            </a:pPr>
-            <a:r>
-              <a:t>• MarketingHub 전사 결재 및 심의 이력 동기화</a:t>
+                  <a:srgbClr val="1E3A5F"/>
+                </a:solidFill>
+              </a:defRPr>
+            </a:pPr>
+            <a:r>
+              <a:t>• SRM-Portal 전사 결재 및 검증 이력 동기화</a:t>
             </a:r>
           </a:p>
           <a:p>
@@ -4942,7 +4942,7 @@
               </a:spcBef>
               <a:defRPr sz="950">
                 <a:solidFill>
-                  <a:srgbClr val="334155"/>
+                  <a:srgbClr val="1E3A5F"/>
                 </a:solidFill>
               </a:defRPr>
             </a:pPr>
@@ -4957,12 +4957,12 @@
               </a:spcBef>
               <a:defRPr sz="950">
                 <a:solidFill>
-                  <a:srgbClr val="334155"/>
-                </a:solidFill>
-              </a:defRPr>
-            </a:pPr>
-            <a:r>
-              <a:t>• KT 비즈 알림톡/SMS 심의 결과 즉시 통보</a:t>
+                  <a:srgbClr val="1E3A5F"/>
+                </a:solidFill>
+              </a:defRPr>
+            </a:pPr>
+            <a:r>
+              <a:t>• KT 비즈 알림톡/SMS 검증 결과 즉시 통보</a:t>
             </a:r>
           </a:p>
         </p:txBody>
@@ -5052,12 +5052,12 @@
               </a:spcBef>
               <a:defRPr sz="950">
                 <a:solidFill>
-                  <a:srgbClr val="334155"/>
-                </a:solidFill>
-              </a:defRPr>
-            </a:pPr>
-            <a:r>
-              <a:t>• 식약처 제품 표시·광고 관리지침 DB화</a:t>
+                  <a:srgbClr val="1E3A5F"/>
+                </a:solidFill>
+              </a:defRPr>
+            </a:pPr>
+            <a:r>
+              <a:t>• 공정위·표준원 구매계약·기술규격 관리지침 DB화</a:t>
             </a:r>
           </a:p>
           <a:p>
@@ -5067,12 +5067,12 @@
               </a:spcBef>
               <a:defRPr sz="950">
                 <a:solidFill>
-                  <a:srgbClr val="334155"/>
-                </a:solidFill>
-              </a:defRPr>
-            </a:pPr>
-            <a:r>
-              <a:t>• 자주 적발되는 허위·과대광고 사례 사전 탑재</a:t>
+                  <a:srgbClr val="1E3A5F"/>
+                </a:solidFill>
+              </a:defRPr>
+            </a:pPr>
+            <a:r>
+              <a:t>• 자주 적발되는 허위·과대구매계약 사례 사전 탑재</a:t>
             </a:r>
           </a:p>
           <a:p>
@@ -5082,12 +5082,12 @@
               </a:spcBef>
               <a:defRPr sz="950">
                 <a:solidFill>
-                  <a:srgbClr val="334155"/>
-                </a:solidFill>
-              </a:defRPr>
-            </a:pPr>
-            <a:r>
-              <a:t>• 대체 추천 문구 100종 데이터베이스 탑재</a:t>
+                  <a:srgbClr val="1E3A5F"/>
+                </a:solidFill>
+              </a:defRPr>
+            </a:pPr>
+            <a:r>
+              <a:t>• 대체 추천 조항 100종 데이터베이스 탑재</a:t>
             </a:r>
           </a:p>
           <a:p>
@@ -5097,7 +5097,7 @@
               </a:spcBef>
               <a:defRPr sz="950">
                 <a:solidFill>
-                  <a:srgbClr val="334155"/>
+                  <a:srgbClr val="1E3A5F"/>
                 </a:solidFill>
               </a:defRPr>
             </a:pPr>
@@ -5200,7 +5200,7 @@
               </a:defRPr>
             </a:pPr>
             <a:r>
-              <a:t>SyncGuard AI 사업 완료보고서  &gt;  3. AI 모델 검증</a:t>
+              <a:t>SyncFlow AI 사업 완료보고서  &gt;  3. AI 모델 검증</a:t>
             </a:r>
           </a:p>
         </p:txBody>
@@ -5265,7 +5265,7 @@
             <a:pPr algn="r">
               <a:defRPr sz="1000" b="1">
                 <a:solidFill>
-                  <a:srgbClr val="1E293B"/>
+                  <a:srgbClr val="0F2942"/>
                 </a:solidFill>
               </a:defRPr>
             </a:pPr>
@@ -5350,7 +5350,7 @@
               </a:defRPr>
             </a:pPr>
             <a:r>
-              <a:t>SyncGuard AI | 프로젝트 최종 완수 및 검수 요청 종료보고서</a:t>
+              <a:t>SyncFlow AI | 프로젝트 최종 완수 및 검수 요청 종료보고서</a:t>
             </a:r>
           </a:p>
         </p:txBody>
@@ -5572,7 +5572,7 @@
                       <a:pPr>
                         <a:defRPr sz="950">
                           <a:solidFill>
-                            <a:srgbClr val="334155"/>
+                            <a:srgbClr val="1E3A5F"/>
                           </a:solidFill>
                         </a:defRPr>
                       </a:pPr>
@@ -5595,7 +5595,7 @@
                       <a:pPr algn="ctr">
                         <a:defRPr sz="950">
                           <a:solidFill>
-                            <a:srgbClr val="334155"/>
+                            <a:srgbClr val="1E3A5F"/>
                           </a:solidFill>
                         </a:defRPr>
                       </a:pPr>
@@ -5641,7 +5641,7 @@
                       <a:pPr algn="ctr">
                         <a:defRPr sz="950">
                           <a:solidFill>
-                            <a:srgbClr val="334155"/>
+                            <a:srgbClr val="1E3A5F"/>
                           </a:solidFill>
                         </a:defRPr>
                       </a:pPr>
@@ -5689,7 +5689,7 @@
                       <a:pPr>
                         <a:defRPr sz="950">
                           <a:solidFill>
-                            <a:srgbClr val="334155"/>
+                            <a:srgbClr val="1E3A5F"/>
                           </a:solidFill>
                         </a:defRPr>
                       </a:pPr>
@@ -5712,7 +5712,7 @@
                       <a:pPr algn="ctr">
                         <a:defRPr sz="950">
                           <a:solidFill>
-                            <a:srgbClr val="334155"/>
+                            <a:srgbClr val="1E3A5F"/>
                           </a:solidFill>
                         </a:defRPr>
                       </a:pPr>
@@ -5758,7 +5758,7 @@
                       <a:pPr algn="ctr">
                         <a:defRPr sz="950">
                           <a:solidFill>
-                            <a:srgbClr val="334155"/>
+                            <a:srgbClr val="1E3A5F"/>
                           </a:solidFill>
                         </a:defRPr>
                       </a:pPr>
@@ -5806,7 +5806,7 @@
                       <a:pPr>
                         <a:defRPr sz="950">
                           <a:solidFill>
-                            <a:srgbClr val="334155"/>
+                            <a:srgbClr val="1E3A5F"/>
                           </a:solidFill>
                         </a:defRPr>
                       </a:pPr>
@@ -5829,7 +5829,7 @@
                       <a:pPr algn="ctr">
                         <a:defRPr sz="950">
                           <a:solidFill>
-                            <a:srgbClr val="334155"/>
+                            <a:srgbClr val="1E3A5F"/>
                           </a:solidFill>
                         </a:defRPr>
                       </a:pPr>
@@ -5875,7 +5875,7 @@
                       <a:pPr algn="ctr">
                         <a:defRPr sz="950">
                           <a:solidFill>
-                            <a:srgbClr val="334155"/>
+                            <a:srgbClr val="1E3A5F"/>
                           </a:solidFill>
                         </a:defRPr>
                       </a:pPr>
@@ -5923,12 +5923,12 @@
                       <a:pPr>
                         <a:defRPr sz="950">
                           <a:solidFill>
-                            <a:srgbClr val="334155"/>
+                            <a:srgbClr val="1E3A5F"/>
                           </a:solidFill>
                         </a:defRPr>
                       </a:pPr>
                       <a:r>
-                        <a:t>단건 심의 응답속도</a:t>
+                        <a:t>단건 검증 응답속도</a:t>
                       </a:r>
                     </a:p>
                   </a:txBody>
@@ -5946,7 +5946,7 @@
                       <a:pPr algn="ctr">
                         <a:defRPr sz="950">
                           <a:solidFill>
-                            <a:srgbClr val="334155"/>
+                            <a:srgbClr val="1E3A5F"/>
                           </a:solidFill>
                         </a:defRPr>
                       </a:pPr>
@@ -5992,7 +5992,7 @@
                       <a:pPr algn="ctr">
                         <a:defRPr sz="950">
                           <a:solidFill>
-                            <a:srgbClr val="334155"/>
+                            <a:srgbClr val="1E3A5F"/>
                           </a:solidFill>
                         </a:defRPr>
                       </a:pPr>
@@ -6040,7 +6040,7 @@
                       <a:pPr>
                         <a:defRPr sz="950">
                           <a:solidFill>
-                            <a:srgbClr val="334155"/>
+                            <a:srgbClr val="1E3A5F"/>
                           </a:solidFill>
                         </a:defRPr>
                       </a:pPr>
@@ -6063,7 +6063,7 @@
                       <a:pPr algn="ctr">
                         <a:defRPr sz="950">
                           <a:solidFill>
-                            <a:srgbClr val="334155"/>
+                            <a:srgbClr val="1E3A5F"/>
                           </a:solidFill>
                         </a:defRPr>
                       </a:pPr>
@@ -6109,7 +6109,7 @@
                       <a:pPr algn="ctr">
                         <a:defRPr sz="950">
                           <a:solidFill>
-                            <a:srgbClr val="334155"/>
+                            <a:srgbClr val="1E3A5F"/>
                           </a:solidFill>
                         </a:defRPr>
                       </a:pPr>
@@ -6237,12 +6237,12 @@
               </a:spcBef>
               <a:defRPr sz="950">
                 <a:solidFill>
-                  <a:srgbClr val="334155"/>
-                </a:solidFill>
-              </a:defRPr>
-            </a:pPr>
-            <a:r>
-              <a:t>• 의약품 오인 표현 탐지율 100%: '치료', '재생', '염증 완화', '세포 증식' 등 식약처 고위험 표현 전수 탐지 및 대체어 즉시 추천 완결.</a:t>
+                  <a:srgbClr val="1E3A5F"/>
+                </a:solidFill>
+              </a:defRPr>
+            </a:pPr>
+            <a:r>
+              <a:t>• 불공정 독소조항 표현 탐지율 100%: '면책', '재생', '부식 완화', '배상한도 증식' 등 공정위·표준원 고위험 표현 전수 탐지 및 표준대안 즉시 추천 완결.</a:t>
             </a:r>
           </a:p>
           <a:p>
@@ -6252,12 +6252,12 @@
               </a:spcBef>
               <a:defRPr sz="950">
                 <a:solidFill>
-                  <a:srgbClr val="334155"/>
-                </a:solidFill>
-              </a:defRPr>
-            </a:pPr>
-            <a:r>
-              <a:t>• 기능성 화장품 범위 검증: 미백, 주름개선, 자외선 차단 3대 고시 성분과 비고시 성분의 과대 주장 문맥을 완벽히 분리 판정.</a:t>
+                  <a:srgbClr val="1E3A5F"/>
+                </a:solidFill>
+              </a:defRPr>
+            </a:pPr>
+            <a:r>
+              <a:t>• 핵심규격 전장부품 범위 검증: 절연성, 내진동성, 전자파 차단 3대 고시 성분과 비고시 성분의 과대 주장 문맥을 완벽히 분리 판정.</a:t>
             </a:r>
           </a:p>
           <a:p>
@@ -6267,12 +6267,12 @@
               </a:spcBef>
               <a:defRPr sz="950">
                 <a:solidFill>
-                  <a:srgbClr val="334155"/>
-                </a:solidFill>
-              </a:defRPr>
-            </a:pPr>
-            <a:r>
-              <a:t>• 부정어 및 문맥 왜곡 방지: '트러블을 치료하지 않고 예방에 도움'과 같은 복합 문맥에서 오경보 없이 정상 판정(청색) 도출 확인.</a:t>
+                  <a:srgbClr val="1E3A5F"/>
+                </a:solidFill>
+              </a:defRPr>
+            </a:pPr>
+            <a:r>
+              <a:t>• 부정어 및 문맥 왜곡 방지: '지체상금을 일방 전가하지 않고 상호 귀책비율에 따라 분담'과 같은 복합 문맥에서 오경보 없이 정상 판정(청색) 도출 확인.</a:t>
             </a:r>
           </a:p>
           <a:p>
@@ -6282,12 +6282,12 @@
               </a:spcBef>
               <a:defRPr sz="950">
                 <a:solidFill>
-                  <a:srgbClr val="334155"/>
-                </a:solidFill>
-              </a:defRPr>
-            </a:pPr>
-            <a:r>
-              <a:t>• 근거 규격 자동 매칭: 판정 결과마다 식약처 표시·광고 공정화법 제3조 및 관리지침 근거 조항을 100% 매핑하여 심의관의 검토 설득력 확보.</a:t>
+                  <a:srgbClr val="1E3A5F"/>
+                </a:solidFill>
+              </a:defRPr>
+            </a:pPr>
+            <a:r>
+              <a:t>• 근거 규격 자동 매칭: 판정 결과마다 공정위·표준원 하도급법 제3조의4 및 관리지침 근거 조항을 100% 매핑하여 검토위원의 검토 설득력 확보.</a:t>
             </a:r>
           </a:p>
         </p:txBody>
@@ -6385,7 +6385,7 @@
               </a:defRPr>
             </a:pPr>
             <a:r>
-              <a:t>SyncGuard AI 사업 완료보고서  &gt;  4. 시범운영 및 ROI</a:t>
+              <a:t>SyncFlow AI 사업 완료보고서  &gt;  4. 시범운영 및 ROI</a:t>
             </a:r>
           </a:p>
         </p:txBody>
@@ -6450,7 +6450,7 @@
             <a:pPr algn="r">
               <a:defRPr sz="1000" b="1">
                 <a:solidFill>
-                  <a:srgbClr val="1E293B"/>
+                  <a:srgbClr val="0F2942"/>
                 </a:solidFill>
               </a:defRPr>
             </a:pPr>
@@ -6535,7 +6535,7 @@
               </a:defRPr>
             </a:pPr>
             <a:r>
-              <a:t>SyncGuard AI | 프로젝트 최종 완수 및 검수 요청 종료보고서</a:t>
+              <a:t>SyncFlow AI | 프로젝트 최종 완수 및 검수 요청 종료보고서</a:t>
             </a:r>
           </a:p>
         </p:txBody>
@@ -6681,7 +6681,7 @@
               </a:defRPr>
             </a:pPr>
             <a:r>
-              <a:t>시범운영 총 심의 건수</a:t>
+              <a:t>시범운영 총 검증 건수</a:t>
             </a:r>
           </a:p>
           <a:p>
@@ -6706,16 +6706,16 @@
               </a:spcBef>
               <a:defRPr sz="900">
                 <a:solidFill>
-                  <a:srgbClr val="334155"/>
-                </a:solidFill>
-              </a:defRPr>
-            </a:pPr>
-            <a:r>
-              <a:t>루미에르, 아쿠아퓨어, 그린네이처 등</a:t>
+                  <a:srgbClr val="1E3A5F"/>
+                </a:solidFill>
+              </a:defRPr>
+            </a:pPr>
+            <a:r>
+              <a:t>전장시스템본부, 배터리모듈본부, 글로벌조달본부 등</a:t>
             </a:r>
             <a:br/>
             <a:r>
-              <a:t>11개 브랜드 실무 적용 완료</a:t>
+              <a:t>11개 사업본부 실무 적용 완료</a:t>
             </a:r>
           </a:p>
         </p:txBody>
@@ -6795,7 +6795,7 @@
               </a:defRPr>
             </a:pPr>
             <a:r>
-              <a:t>RA 담당자 판정 일치율</a:t>
+              <a:t>법무·QA 담당자 판정 일치율</a:t>
             </a:r>
           </a:p>
           <a:p>
@@ -6820,7 +6820,7 @@
               </a:spcBef>
               <a:defRPr sz="900">
                 <a:solidFill>
-                  <a:srgbClr val="334155"/>
+                  <a:srgbClr val="1E3A5F"/>
                 </a:solidFill>
               </a:defRPr>
             </a:pPr>
@@ -6909,7 +6909,7 @@
               </a:defRPr>
             </a:pPr>
             <a:r>
-              <a:t>심의 리드타임 단축</a:t>
+              <a:t>검증 리드타임 단축</a:t>
             </a:r>
           </a:p>
           <a:p>
@@ -6934,7 +6934,7 @@
               </a:spcBef>
               <a:defRPr sz="900">
                 <a:solidFill>
-                  <a:srgbClr val="334155"/>
+                  <a:srgbClr val="1E3A5F"/>
                 </a:solidFill>
               </a:defRPr>
             </a:pPr>
@@ -7048,12 +7048,12 @@
               </a:spcBef>
               <a:defRPr sz="900">
                 <a:solidFill>
-                  <a:srgbClr val="334155"/>
-                </a:solidFill>
-              </a:defRPr>
-            </a:pPr>
-            <a:r>
-              <a:t>RA 검토 인력 연간 환산</a:t>
+                  <a:srgbClr val="1E3A5F"/>
+                </a:solidFill>
+              </a:defRPr>
+            </a:pPr>
+            <a:r>
+              <a:t>법무·QA 검토 인력 연간 환산</a:t>
             </a:r>
             <a:br/>
             <a:r>
@@ -7147,12 +7147,12 @@
               </a:spcBef>
               <a:defRPr sz="950">
                 <a:solidFill>
-                  <a:srgbClr val="334155"/>
-                </a:solidFill>
-              </a:defRPr>
-            </a:pPr>
-            <a:r>
-              <a:t>• 규제 리스크 사전 원천 차단: 식약처 모니터링 적발 및 광고업무정지 행정처분 위험 0건화 달성.</a:t>
+                  <a:srgbClr val="1E3A5F"/>
+                </a:solidFill>
+              </a:defRPr>
+            </a:pPr>
+            <a:r>
+              <a:t>• 규제 리스크 사전 원천 차단: 공정위·표준원 모니터링 적발 및 구매계약업무정지 시정명령·심결 위험 0건화 달성.</a:t>
             </a:r>
           </a:p>
           <a:p>
@@ -7162,12 +7162,12 @@
               </a:spcBef>
               <a:defRPr sz="950">
                 <a:solidFill>
-                  <a:srgbClr val="334155"/>
-                </a:solidFill>
-              </a:defRPr>
-            </a:pPr>
-            <a:r>
-              <a:t>• 마케팅 캠페인 타임-투-마켓 가속화: 신제품 출시 및 긴급 프로모션 기획 시 심의 대기 시간을 즉시 단축하여 시장 선점 지원.</a:t>
+                  <a:srgbClr val="1E3A5F"/>
+                </a:solidFill>
+              </a:defRPr>
+            </a:pPr>
+            <a:r>
+              <a:t>• 구매조달 조달프로젝트 타임-투-마켓 가속화: 신규 차종 양산발주 및 긴급 단가계약 기획 시 검토 대기 시간을 즉시 단축하여 시장 선점 지원.</a:t>
             </a:r>
           </a:p>
           <a:p>
@@ -7177,12 +7177,12 @@
               </a:spcBef>
               <a:defRPr sz="950">
                 <a:solidFill>
-                  <a:srgbClr val="334155"/>
-                </a:solidFill>
-              </a:defRPr>
-            </a:pPr>
-            <a:r>
-              <a:t>• RA 심의 기준의 전사 표준화: 심의 담당자별 주관적 판단 편차를 배제하고 AI 룰셋 기반의 객관적·일관된 기준 수립.</a:t>
+                  <a:srgbClr val="1E3A5F"/>
+                </a:solidFill>
+              </a:defRPr>
+            </a:pPr>
+            <a:r>
+              <a:t>• QA 검증 기준의 전사 표준화: 검증 담당자별 주관적 판단 편차를 배제하고 AI 룰셋 기반의 객관적·일관된 기준 수립.</a:t>
             </a:r>
           </a:p>
           <a:p>
@@ -7192,7 +7192,7 @@
               </a:spcBef>
               <a:defRPr sz="950">
                 <a:solidFill>
-                  <a:srgbClr val="334155"/>
+                  <a:srgbClr val="1E3A5F"/>
                 </a:solidFill>
               </a:defRPr>
             </a:pPr>
@@ -7295,7 +7295,7 @@
               </a:defRPr>
             </a:pPr>
             <a:r>
-              <a:t>SyncGuard AI 사업 완료보고서  &gt;  5. 산출물 인계</a:t>
+              <a:t>SyncFlow AI 사업 완료보고서  &gt;  5. 산출물 인계</a:t>
             </a:r>
           </a:p>
         </p:txBody>
@@ -7360,7 +7360,7 @@
             <a:pPr algn="r">
               <a:defRPr sz="1000" b="1">
                 <a:solidFill>
-                  <a:srgbClr val="1E293B"/>
+                  <a:srgbClr val="0F2942"/>
                 </a:solidFill>
               </a:defRPr>
             </a:pPr>
@@ -7445,7 +7445,7 @@
               </a:defRPr>
             </a:pPr>
             <a:r>
-              <a:t>SyncGuard AI | 프로젝트 최종 완수 및 검수 요청 종료보고서</a:t>
+              <a:t>SyncFlow AI | 프로젝트 최종 완수 및 검수 요청 종료보고서</a:t>
             </a:r>
           </a:p>
         </p:txBody>
@@ -7690,7 +7690,7 @@
                       <a:pPr algn="ctr">
                         <a:defRPr sz="900">
                           <a:solidFill>
-                            <a:srgbClr val="334155"/>
+                            <a:srgbClr val="1E3A5F"/>
                           </a:solidFill>
                         </a:defRPr>
                       </a:pPr>
@@ -7717,7 +7717,7 @@
                       <a:pPr>
                         <a:defRPr sz="900">
                           <a:solidFill>
-                            <a:srgbClr val="334155"/>
+                            <a:srgbClr val="1E3A5F"/>
                           </a:solidFill>
                         </a:defRPr>
                       </a:pPr>
@@ -7744,7 +7744,7 @@
                       <a:pPr algn="ctr">
                         <a:defRPr sz="900">
                           <a:solidFill>
-                            <a:srgbClr val="334155"/>
+                            <a:srgbClr val="1E3A5F"/>
                           </a:solidFill>
                         </a:defRPr>
                       </a:pPr>
@@ -7815,7 +7815,7 @@
                       <a:pPr algn="ctr">
                         <a:defRPr sz="900">
                           <a:solidFill>
-                            <a:srgbClr val="334155"/>
+                            <a:srgbClr val="1E3A5F"/>
                           </a:solidFill>
                         </a:defRPr>
                       </a:pPr>
@@ -7846,7 +7846,7 @@
                       <a:pPr>
                         <a:defRPr sz="900">
                           <a:solidFill>
-                            <a:srgbClr val="334155"/>
+                            <a:srgbClr val="1E3A5F"/>
                           </a:solidFill>
                         </a:defRPr>
                       </a:pPr>
@@ -7873,7 +7873,7 @@
                       <a:pPr algn="ctr">
                         <a:defRPr sz="900">
                           <a:solidFill>
-                            <a:srgbClr val="334155"/>
+                            <a:srgbClr val="1E3A5F"/>
                           </a:solidFill>
                         </a:defRPr>
                       </a:pPr>
@@ -7944,7 +7944,7 @@
                       <a:pPr algn="ctr">
                         <a:defRPr sz="900">
                           <a:solidFill>
-                            <a:srgbClr val="334155"/>
+                            <a:srgbClr val="1E3A5F"/>
                           </a:solidFill>
                         </a:defRPr>
                       </a:pPr>
@@ -7975,12 +7975,12 @@
                       <a:pPr>
                         <a:defRPr sz="900">
                           <a:solidFill>
-                            <a:srgbClr val="334155"/>
+                            <a:srgbClr val="1E3A5F"/>
                           </a:solidFill>
                         </a:defRPr>
                       </a:pPr>
                       <a:r>
-                        <a:t>규칙사전정의서, 프롬프트명세서, ProductLab연계명세서</a:t>
+                        <a:t>규칙사전정의서, 프롬프트명세서, PLM-Nexus연계명세서</a:t>
                       </a:r>
                       <a:br/>
                       <a:r>
@@ -8002,7 +8002,7 @@
                       <a:pPr algn="ctr">
                         <a:defRPr sz="900">
                           <a:solidFill>
-                            <a:srgbClr val="334155"/>
+                            <a:srgbClr val="1E3A5F"/>
                           </a:solidFill>
                         </a:defRPr>
                       </a:pPr>
@@ -8073,7 +8073,7 @@
                       <a:pPr algn="ctr">
                         <a:defRPr sz="900">
                           <a:solidFill>
-                            <a:srgbClr val="334155"/>
+                            <a:srgbClr val="1E3A5F"/>
                           </a:solidFill>
                         </a:defRPr>
                       </a:pPr>
@@ -8100,7 +8100,7 @@
                       <a:pPr>
                         <a:defRPr sz="900">
                           <a:solidFill>
-                            <a:srgbClr val="334155"/>
+                            <a:srgbClr val="1E3A5F"/>
                           </a:solidFill>
                         </a:defRPr>
                       </a:pPr>
@@ -8127,7 +8127,7 @@
                       <a:pPr algn="ctr">
                         <a:defRPr sz="900">
                           <a:solidFill>
-                            <a:srgbClr val="334155"/>
+                            <a:srgbClr val="1E3A5F"/>
                           </a:solidFill>
                         </a:defRPr>
                       </a:pPr>
@@ -8198,7 +8198,7 @@
                       <a:pPr algn="ctr">
                         <a:defRPr sz="900">
                           <a:solidFill>
-                            <a:srgbClr val="334155"/>
+                            <a:srgbClr val="1E3A5F"/>
                           </a:solidFill>
                         </a:defRPr>
                       </a:pPr>
@@ -8229,7 +8229,7 @@
                       <a:pPr>
                         <a:defRPr sz="900">
                           <a:solidFill>
-                            <a:srgbClr val="334155"/>
+                            <a:srgbClr val="1E3A5F"/>
                           </a:solidFill>
                         </a:defRPr>
                       </a:pPr>
@@ -8256,7 +8256,7 @@
                       <a:pPr algn="ctr">
                         <a:defRPr sz="900">
                           <a:solidFill>
-                            <a:srgbClr val="334155"/>
+                            <a:srgbClr val="1E3A5F"/>
                           </a:solidFill>
                         </a:defRPr>
                       </a:pPr>
@@ -8327,7 +8327,7 @@
                       <a:pPr algn="ctr">
                         <a:defRPr sz="900">
                           <a:solidFill>
-                            <a:srgbClr val="334155"/>
+                            <a:srgbClr val="1E3A5F"/>
                           </a:solidFill>
                         </a:defRPr>
                       </a:pPr>
@@ -8358,7 +8358,7 @@
                       <a:pPr>
                         <a:defRPr sz="900">
                           <a:solidFill>
-                            <a:srgbClr val="334155"/>
+                            <a:srgbClr val="1E3A5F"/>
                           </a:solidFill>
                         </a:defRPr>
                       </a:pPr>
@@ -8385,7 +8385,7 @@
                       <a:pPr algn="ctr">
                         <a:defRPr sz="900">
                           <a:solidFill>
-                            <a:srgbClr val="334155"/>
+                            <a:srgbClr val="1E3A5F"/>
                           </a:solidFill>
                         </a:defRPr>
                       </a:pPr>
@@ -8521,7 +8521,7 @@
               </a:defRPr>
             </a:pPr>
             <a:r>
-              <a:t>SyncGuard AI 사업 완료보고서  &gt;  6. 유지보수 및 지원</a:t>
+              <a:t>SyncFlow AI 사업 완료보고서  &gt;  6. 유지보수 및 지원</a:t>
             </a:r>
           </a:p>
         </p:txBody>
@@ -8586,7 +8586,7 @@
             <a:pPr algn="r">
               <a:defRPr sz="1000" b="1">
                 <a:solidFill>
-                  <a:srgbClr val="1E293B"/>
+                  <a:srgbClr val="0F2942"/>
                 </a:solidFill>
               </a:defRPr>
             </a:pPr>
@@ -8671,7 +8671,7 @@
               </a:defRPr>
             </a:pPr>
             <a:r>
-              <a:t>SyncGuard AI | 프로젝트 최종 완수 및 검수 요청 종료보고서</a:t>
+              <a:t>SyncFlow AI | 프로젝트 최종 완수 및 검수 요청 종료보고서</a:t>
             </a:r>
           </a:p>
         </p:txBody>
@@ -8827,7 +8827,7 @@
               </a:spcBef>
               <a:defRPr sz="950">
                 <a:solidFill>
-                  <a:srgbClr val="334155"/>
+                  <a:srgbClr val="1E3A5F"/>
                 </a:solidFill>
               </a:defRPr>
             </a:pPr>
@@ -8842,7 +8842,7 @@
               </a:spcBef>
               <a:defRPr sz="950">
                 <a:solidFill>
-                  <a:srgbClr val="334155"/>
+                  <a:srgbClr val="1E3A5F"/>
                 </a:solidFill>
               </a:defRPr>
             </a:pPr>
@@ -8857,7 +8857,7 @@
               </a:spcBef>
               <a:defRPr sz="950">
                 <a:solidFill>
-                  <a:srgbClr val="334155"/>
+                  <a:srgbClr val="1E3A5F"/>
                 </a:solidFill>
               </a:defRPr>
             </a:pPr>
@@ -8952,7 +8952,7 @@
               </a:spcBef>
               <a:defRPr sz="950">
                 <a:solidFill>
-                  <a:srgbClr val="334155"/>
+                  <a:srgbClr val="1E3A5F"/>
                 </a:solidFill>
               </a:defRPr>
             </a:pPr>
@@ -8967,12 +8967,12 @@
               </a:spcBef>
               <a:defRPr sz="950">
                 <a:solidFill>
-                  <a:srgbClr val="334155"/>
-                </a:solidFill>
-              </a:defRPr>
-            </a:pPr>
-            <a:r>
-              <a:t>• 중대 (P2, 일부 브랜드 심의 불가): 접수 1시간 내 착수, 4시간 내 해결</a:t>
+                  <a:srgbClr val="1E3A5F"/>
+                </a:solidFill>
+              </a:defRPr>
+            </a:pPr>
+            <a:r>
+              <a:t>• 중대 (P2, 일부 사업본부 검증 불가): 접수 1시간 내 착수, 4시간 내 해결</a:t>
             </a:r>
           </a:p>
           <a:p>
@@ -8982,7 +8982,7 @@
               </a:spcBef>
               <a:defRPr sz="950">
                 <a:solidFill>
-                  <a:srgbClr val="334155"/>
+                  <a:srgbClr val="1E3A5F"/>
                 </a:solidFill>
               </a:defRPr>
             </a:pPr>
@@ -9077,7 +9077,7 @@
               </a:spcBef>
               <a:defRPr sz="950">
                 <a:solidFill>
-                  <a:srgbClr val="334155"/>
+                  <a:srgbClr val="1E3A5F"/>
                 </a:solidFill>
               </a:defRPr>
             </a:pPr>
@@ -9092,7 +9092,7 @@
               </a:spcBef>
               <a:defRPr sz="950">
                 <a:solidFill>
-                  <a:srgbClr val="334155"/>
+                  <a:srgbClr val="1E3A5F"/>
                 </a:solidFill>
               </a:defRPr>
             </a:pPr>
@@ -9107,7 +9107,7 @@
               </a:spcBef>
               <a:defRPr sz="950">
                 <a:solidFill>
-                  <a:srgbClr val="334155"/>
+                  <a:srgbClr val="1E3A5F"/>
                 </a:solidFill>
               </a:defRPr>
             </a:pPr>
@@ -9202,12 +9202,12 @@
               </a:spcBef>
               <a:defRPr sz="950">
                 <a:solidFill>
-                  <a:srgbClr val="334155"/>
-                </a:solidFill>
-              </a:defRPr>
-            </a:pPr>
-            <a:r>
-              <a:t>• RA 실무자 대상 화면별 심의 실습 교육 완료 (18명 수료)</a:t>
+                  <a:srgbClr val="1E3A5F"/>
+                </a:solidFill>
+              </a:defRPr>
+            </a:pPr>
+            <a:r>
+              <a:t>• QA 실무자 대상 화면별 검증 실습 교육 완료 (18명 수료)</a:t>
             </a:r>
           </a:p>
           <a:p>
@@ -9217,7 +9217,7 @@
               </a:spcBef>
               <a:defRPr sz="950">
                 <a:solidFill>
-                  <a:srgbClr val="334155"/>
+                  <a:srgbClr val="1E3A5F"/>
                 </a:solidFill>
               </a:defRPr>
             </a:pPr>
@@ -9232,7 +9232,7 @@
               </a:spcBef>
               <a:defRPr sz="950">
                 <a:solidFill>
-                  <a:srgbClr val="334155"/>
+                  <a:srgbClr val="1E3A5F"/>
                 </a:solidFill>
               </a:defRPr>
             </a:pPr>
@@ -9335,7 +9335,7 @@
               </a:defRPr>
             </a:pPr>
             <a:r>
-              <a:t>SyncGuard AI 사업 완료보고서  &gt;  7. 검수 요청 및 승인</a:t>
+              <a:t>SyncFlow AI 사업 완료보고서  &gt;  7. 검수 요청 및 승인</a:t>
             </a:r>
           </a:p>
         </p:txBody>
@@ -9400,7 +9400,7 @@
             <a:pPr algn="r">
               <a:defRPr sz="1000" b="1">
                 <a:solidFill>
-                  <a:srgbClr val="1E293B"/>
+                  <a:srgbClr val="0F2942"/>
                 </a:solidFill>
               </a:defRPr>
             </a:pPr>
@@ -9485,7 +9485,7 @@
               </a:defRPr>
             </a:pPr>
             <a:r>
-              <a:t>SyncGuard AI | 프로젝트 최종 완수 및 검수 요청 종료보고서</a:t>
+              <a:t>SyncFlow AI | 프로젝트 최종 완수 및 검수 요청 종료보고서</a:t>
             </a:r>
           </a:p>
         </p:txBody>
@@ -9641,12 +9641,12 @@
               </a:spcBef>
               <a:defRPr sz="1000">
                 <a:solidFill>
-                  <a:srgbClr val="334155"/>
-                </a:solidFill>
-              </a:defRPr>
-            </a:pPr>
-            <a:r>
-              <a:t>주식회사 한빛글로벌과 주식회사 엠파시 간 체결한 「SyncGuard AI 시스템 구축 용역 계약」에 의거하여, 제안요청서(RFP) 및 사업수행계획서에 명시된 기능 요구사항 42개 항목 및 비기능 요구사항을 100% 완수하였으며, 시범운영 및 최종 산출물 28종의 인계를 완료하였기에 본 사업의 최종 완료를 보고하고 검수를 정식으로 요청합니다.</a:t>
+                  <a:srgbClr val="1E3A5F"/>
+                </a:solidFill>
+              </a:defRPr>
+            </a:pPr>
+            <a:r>
+              <a:t>주식회사 한빛글로벌과 주식회사 엠파시 간 체결한 「SyncFlow AI 시스템 구축 용역 계약」에 의거하여, 제안요청서(RFP) 및 사업수행계획서에 명시된 기능 요구사항 42개 항목 및 비기능 요구사항을 100% 완수하였으며, 시범운영 및 최종 산출물 28종의 인계를 완료하였기에 본 사업의 최종 완료를 보고하고 검수를 정식으로 요청합니다.</a:t>
             </a:r>
           </a:p>
           <a:p>
@@ -9751,7 +9751,7 @@
               </a:spcBef>
               <a:defRPr sz="1000">
                 <a:solidFill>
-                  <a:srgbClr val="334155"/>
+                  <a:srgbClr val="1E3A5F"/>
                 </a:solidFill>
               </a:defRPr>
             </a:pPr>
@@ -9760,7 +9760,7 @@
             </a:r>
             <a:br/>
             <a:r>
-              <a:t>RA팀 검수책임관</a:t>
+              <a:t>QA팀 검수책임관</a:t>
             </a:r>
             <a:br/>
             <a:br/>
@@ -9855,7 +9855,7 @@
               </a:spcBef>
               <a:defRPr sz="1000">
                 <a:solidFill>
-                  <a:srgbClr val="334155"/>
+                  <a:srgbClr val="1E3A5F"/>
                 </a:solidFill>
               </a:defRPr>
             </a:pPr>
@@ -9959,7 +9959,7 @@
               </a:spcBef>
               <a:defRPr sz="1000">
                 <a:solidFill>
-                  <a:srgbClr val="334155"/>
+                  <a:srgbClr val="1E3A5F"/>
                 </a:solidFill>
               </a:defRPr>
             </a:pPr>
